--- a/figures/figures.pptx
+++ b/figures/figures.pptx
@@ -6,7 +6,8 @@
   </p:sldMasterIdLst>
   <p:sldIdLst>
     <p:sldId id="256" r:id="rId2"/>
-    <p:sldId id="257" r:id="rId3"/>
+    <p:sldId id="258" r:id="rId3"/>
+    <p:sldId id="257" r:id="rId4"/>
   </p:sldIdLst>
   <p:sldSz cx="12192000" cy="6858000"/>
   <p:notesSz cx="6858000" cy="9144000"/>
@@ -365,7 +366,7 @@
           <a:p>
             <a:fld id="{1C388655-0FDE-4AB2-A1F2-546A4DB4CF04}" type="datetimeFigureOut">
               <a:rPr lang="en-CA" smtClean="0"/>
-              <a:t>2025-03-04</a:t>
+              <a:t>2025-10-17</a:t>
             </a:fld>
             <a:endParaRPr lang="en-CA"/>
           </a:p>
@@ -565,7 +566,7 @@
           <a:p>
             <a:fld id="{1C388655-0FDE-4AB2-A1F2-546A4DB4CF04}" type="datetimeFigureOut">
               <a:rPr lang="en-CA" smtClean="0"/>
-              <a:t>2025-03-04</a:t>
+              <a:t>2025-10-17</a:t>
             </a:fld>
             <a:endParaRPr lang="en-CA"/>
           </a:p>
@@ -775,7 +776,7 @@
           <a:p>
             <a:fld id="{1C388655-0FDE-4AB2-A1F2-546A4DB4CF04}" type="datetimeFigureOut">
               <a:rPr lang="en-CA" smtClean="0"/>
-              <a:t>2025-03-04</a:t>
+              <a:t>2025-10-17</a:t>
             </a:fld>
             <a:endParaRPr lang="en-CA"/>
           </a:p>
@@ -975,7 +976,7 @@
           <a:p>
             <a:fld id="{1C388655-0FDE-4AB2-A1F2-546A4DB4CF04}" type="datetimeFigureOut">
               <a:rPr lang="en-CA" smtClean="0"/>
-              <a:t>2025-03-04</a:t>
+              <a:t>2025-10-17</a:t>
             </a:fld>
             <a:endParaRPr lang="en-CA"/>
           </a:p>
@@ -1251,7 +1252,7 @@
           <a:p>
             <a:fld id="{1C388655-0FDE-4AB2-A1F2-546A4DB4CF04}" type="datetimeFigureOut">
               <a:rPr lang="en-CA" smtClean="0"/>
-              <a:t>2025-03-04</a:t>
+              <a:t>2025-10-17</a:t>
             </a:fld>
             <a:endParaRPr lang="en-CA"/>
           </a:p>
@@ -1519,7 +1520,7 @@
           <a:p>
             <a:fld id="{1C388655-0FDE-4AB2-A1F2-546A4DB4CF04}" type="datetimeFigureOut">
               <a:rPr lang="en-CA" smtClean="0"/>
-              <a:t>2025-03-04</a:t>
+              <a:t>2025-10-17</a:t>
             </a:fld>
             <a:endParaRPr lang="en-CA"/>
           </a:p>
@@ -1934,7 +1935,7 @@
           <a:p>
             <a:fld id="{1C388655-0FDE-4AB2-A1F2-546A4DB4CF04}" type="datetimeFigureOut">
               <a:rPr lang="en-CA" smtClean="0"/>
-              <a:t>2025-03-04</a:t>
+              <a:t>2025-10-17</a:t>
             </a:fld>
             <a:endParaRPr lang="en-CA"/>
           </a:p>
@@ -2076,7 +2077,7 @@
           <a:p>
             <a:fld id="{1C388655-0FDE-4AB2-A1F2-546A4DB4CF04}" type="datetimeFigureOut">
               <a:rPr lang="en-CA" smtClean="0"/>
-              <a:t>2025-03-04</a:t>
+              <a:t>2025-10-17</a:t>
             </a:fld>
             <a:endParaRPr lang="en-CA"/>
           </a:p>
@@ -2189,7 +2190,7 @@
           <a:p>
             <a:fld id="{1C388655-0FDE-4AB2-A1F2-546A4DB4CF04}" type="datetimeFigureOut">
               <a:rPr lang="en-CA" smtClean="0"/>
-              <a:t>2025-03-04</a:t>
+              <a:t>2025-10-17</a:t>
             </a:fld>
             <a:endParaRPr lang="en-CA"/>
           </a:p>
@@ -2502,7 +2503,7 @@
           <a:p>
             <a:fld id="{1C388655-0FDE-4AB2-A1F2-546A4DB4CF04}" type="datetimeFigureOut">
               <a:rPr lang="en-CA" smtClean="0"/>
-              <a:t>2025-03-04</a:t>
+              <a:t>2025-10-17</a:t>
             </a:fld>
             <a:endParaRPr lang="en-CA"/>
           </a:p>
@@ -2791,7 +2792,7 @@
           <a:p>
             <a:fld id="{1C388655-0FDE-4AB2-A1F2-546A4DB4CF04}" type="datetimeFigureOut">
               <a:rPr lang="en-CA" smtClean="0"/>
-              <a:t>2025-03-04</a:t>
+              <a:t>2025-10-17</a:t>
             </a:fld>
             <a:endParaRPr lang="en-CA"/>
           </a:p>
@@ -3034,7 +3035,7 @@
           <a:p>
             <a:fld id="{1C388655-0FDE-4AB2-A1F2-546A4DB4CF04}" type="datetimeFigureOut">
               <a:rPr lang="en-CA" smtClean="0"/>
-              <a:t>2025-03-04</a:t>
+              <a:t>2025-10-17</a:t>
             </a:fld>
             <a:endParaRPr lang="en-CA"/>
           </a:p>
@@ -5072,6 +5073,738 @@
 </file>
 
 <file path=ppt/slides/slide2.xml><?xml version="1.0" encoding="utf-8"?>
+<p:sld xmlns:a="http://schemas.openxmlformats.org/drawingml/2006/main" xmlns:r="http://schemas.openxmlformats.org/officeDocument/2006/relationships" xmlns:p="http://schemas.openxmlformats.org/presentationml/2006/main">
+  <p:cSld>
+    <p:spTree>
+      <p:nvGrpSpPr>
+        <p:cNvPr id="1" name=""/>
+        <p:cNvGrpSpPr/>
+        <p:nvPr/>
+      </p:nvGrpSpPr>
+      <p:grpSpPr>
+        <a:xfrm>
+          <a:off x="0" y="0"/>
+          <a:ext cx="0" cy="0"/>
+          <a:chOff x="0" y="0"/>
+          <a:chExt cx="0" cy="0"/>
+        </a:xfrm>
+      </p:grpSpPr>
+      <p:pic>
+        <p:nvPicPr>
+          <p:cNvPr id="5" name="Picture 4" descr="A group of colorful shapes&#10;&#10;AI-generated content may be incorrect.">
+            <a:extLst>
+              <a:ext uri="{FF2B5EF4-FFF2-40B4-BE49-F238E27FC236}">
+                <a16:creationId xmlns:a16="http://schemas.microsoft.com/office/drawing/2014/main" id="{311E5DF3-D322-8B34-3390-AA0125F3C778}"/>
+              </a:ext>
+            </a:extLst>
+          </p:cNvPr>
+          <p:cNvPicPr>
+            <a:picLocks noChangeAspect="1"/>
+          </p:cNvPicPr>
+          <p:nvPr/>
+        </p:nvPicPr>
+        <p:blipFill>
+          <a:blip r:embed="rId2">
+            <a:extLst>
+              <a:ext uri="{28A0092B-C50C-407E-A947-70E740481C1C}">
+                <a14:useLocalDpi xmlns:a14="http://schemas.microsoft.com/office/drawing/2010/main" val="0"/>
+              </a:ext>
+            </a:extLst>
+          </a:blip>
+          <a:stretch>
+            <a:fillRect/>
+          </a:stretch>
+        </p:blipFill>
+        <p:spPr>
+          <a:xfrm>
+            <a:off x="1524000" y="0"/>
+            <a:ext cx="9143999" cy="6858000"/>
+          </a:xfrm>
+          <a:prstGeom prst="rect">
+            <a:avLst/>
+          </a:prstGeom>
+        </p:spPr>
+      </p:pic>
+      <p:sp>
+        <p:nvSpPr>
+          <p:cNvPr id="6" name="TextBox 5">
+            <a:extLst>
+              <a:ext uri="{FF2B5EF4-FFF2-40B4-BE49-F238E27FC236}">
+                <a16:creationId xmlns:a16="http://schemas.microsoft.com/office/drawing/2014/main" id="{3ECFF0CC-254B-CB13-6D58-65478CF68937}"/>
+              </a:ext>
+            </a:extLst>
+          </p:cNvPr>
+          <p:cNvSpPr txBox="1"/>
+          <p:nvPr/>
+        </p:nvSpPr>
+        <p:spPr>
+          <a:xfrm>
+            <a:off x="2055303" y="0"/>
+            <a:ext cx="1998432" cy="307777"/>
+          </a:xfrm>
+          <a:prstGeom prst="rect">
+            <a:avLst/>
+          </a:prstGeom>
+          <a:solidFill>
+            <a:schemeClr val="bg1"/>
+          </a:solidFill>
+        </p:spPr>
+        <p:txBody>
+          <a:bodyPr wrap="none" rtlCol="0">
+            <a:spAutoFit/>
+          </a:bodyPr>
+          <a:lstStyle/>
+          <a:p>
+            <a:r>
+              <a:rPr lang="en-CA" sz="1400" dirty="0"/>
+              <a:t>Horned Grebe (VI: 1.00)</a:t>
+            </a:r>
+          </a:p>
+        </p:txBody>
+      </p:sp>
+      <p:sp>
+        <p:nvSpPr>
+          <p:cNvPr id="7" name="TextBox 6">
+            <a:extLst>
+              <a:ext uri="{FF2B5EF4-FFF2-40B4-BE49-F238E27FC236}">
+                <a16:creationId xmlns:a16="http://schemas.microsoft.com/office/drawing/2014/main" id="{8B1A5FF3-5B77-CE26-F04E-D8FACBE669C5}"/>
+              </a:ext>
+            </a:extLst>
+          </p:cNvPr>
+          <p:cNvSpPr txBox="1"/>
+          <p:nvPr/>
+        </p:nvSpPr>
+        <p:spPr>
+          <a:xfrm>
+            <a:off x="5151606" y="-1"/>
+            <a:ext cx="1888787" cy="307777"/>
+          </a:xfrm>
+          <a:prstGeom prst="rect">
+            <a:avLst/>
+          </a:prstGeom>
+          <a:solidFill>
+            <a:schemeClr val="bg1"/>
+          </a:solidFill>
+        </p:spPr>
+        <p:txBody>
+          <a:bodyPr wrap="none" rtlCol="0">
+            <a:spAutoFit/>
+          </a:bodyPr>
+          <a:lstStyle/>
+          <a:p>
+            <a:r>
+              <a:rPr lang="en-CA" sz="1400" dirty="0"/>
+              <a:t>Least Bittern (VI: 0.20)</a:t>
+            </a:r>
+          </a:p>
+        </p:txBody>
+      </p:sp>
+      <p:sp>
+        <p:nvSpPr>
+          <p:cNvPr id="8" name="TextBox 7">
+            <a:extLst>
+              <a:ext uri="{FF2B5EF4-FFF2-40B4-BE49-F238E27FC236}">
+                <a16:creationId xmlns:a16="http://schemas.microsoft.com/office/drawing/2014/main" id="{4A3E9E48-2211-D5FB-0E4A-61D7660EDB40}"/>
+              </a:ext>
+            </a:extLst>
+          </p:cNvPr>
+          <p:cNvSpPr txBox="1"/>
+          <p:nvPr/>
+        </p:nvSpPr>
+        <p:spPr>
+          <a:xfrm>
+            <a:off x="8377806" y="0"/>
+            <a:ext cx="1491883" cy="307777"/>
+          </a:xfrm>
+          <a:prstGeom prst="rect">
+            <a:avLst/>
+          </a:prstGeom>
+          <a:solidFill>
+            <a:schemeClr val="bg1"/>
+          </a:solidFill>
+        </p:spPr>
+        <p:txBody>
+          <a:bodyPr wrap="none" rtlCol="0">
+            <a:spAutoFit/>
+          </a:bodyPr>
+          <a:lstStyle/>
+          <a:p>
+            <a:r>
+              <a:rPr lang="en-CA" sz="1400" dirty="0"/>
+              <a:t>Mallard (VI: 0.02)</a:t>
+            </a:r>
+          </a:p>
+        </p:txBody>
+      </p:sp>
+      <p:sp>
+        <p:nvSpPr>
+          <p:cNvPr id="9" name="TextBox 8">
+            <a:extLst>
+              <a:ext uri="{FF2B5EF4-FFF2-40B4-BE49-F238E27FC236}">
+                <a16:creationId xmlns:a16="http://schemas.microsoft.com/office/drawing/2014/main" id="{C0956ABF-A844-2D5D-A5C9-AD440149CB6C}"/>
+              </a:ext>
+            </a:extLst>
+          </p:cNvPr>
+          <p:cNvSpPr txBox="1"/>
+          <p:nvPr/>
+        </p:nvSpPr>
+        <p:spPr>
+          <a:xfrm>
+            <a:off x="2218361" y="3319244"/>
+            <a:ext cx="1835374" cy="307777"/>
+          </a:xfrm>
+          <a:prstGeom prst="rect">
+            <a:avLst/>
+          </a:prstGeom>
+          <a:solidFill>
+            <a:schemeClr val="bg1"/>
+          </a:solidFill>
+        </p:spPr>
+        <p:txBody>
+          <a:bodyPr wrap="none" rtlCol="0">
+            <a:spAutoFit/>
+          </a:bodyPr>
+          <a:lstStyle/>
+          <a:p>
+            <a:r>
+              <a:rPr lang="en-CA" sz="1400" dirty="0"/>
+              <a:t>Marsh Wren (VI: 0.03)</a:t>
+            </a:r>
+          </a:p>
+        </p:txBody>
+      </p:sp>
+      <p:sp>
+        <p:nvSpPr>
+          <p:cNvPr id="10" name="TextBox 9">
+            <a:extLst>
+              <a:ext uri="{FF2B5EF4-FFF2-40B4-BE49-F238E27FC236}">
+                <a16:creationId xmlns:a16="http://schemas.microsoft.com/office/drawing/2014/main" id="{BF4C652D-6EA0-2DD0-80EE-DF95C0E2648D}"/>
+              </a:ext>
+            </a:extLst>
+          </p:cNvPr>
+          <p:cNvSpPr txBox="1"/>
+          <p:nvPr/>
+        </p:nvSpPr>
+        <p:spPr>
+          <a:xfrm>
+            <a:off x="5366184" y="3319243"/>
+            <a:ext cx="1459630" cy="307777"/>
+          </a:xfrm>
+          <a:prstGeom prst="rect">
+            <a:avLst/>
+          </a:prstGeom>
+          <a:solidFill>
+            <a:schemeClr val="bg1"/>
+          </a:solidFill>
+        </p:spPr>
+        <p:txBody>
+          <a:bodyPr wrap="none" rtlCol="0">
+            <a:spAutoFit/>
+          </a:bodyPr>
+          <a:lstStyle/>
+          <a:p>
+            <a:r>
+              <a:rPr lang="en-CA" sz="1400" dirty="0"/>
+              <a:t>Osprey (VI: 0.05)</a:t>
+            </a:r>
+          </a:p>
+        </p:txBody>
+      </p:sp>
+      <p:sp>
+        <p:nvSpPr>
+          <p:cNvPr id="11" name="TextBox 10">
+            <a:extLst>
+              <a:ext uri="{FF2B5EF4-FFF2-40B4-BE49-F238E27FC236}">
+                <a16:creationId xmlns:a16="http://schemas.microsoft.com/office/drawing/2014/main" id="{1438EF9E-42C4-0047-4F50-0184250F8432}"/>
+              </a:ext>
+            </a:extLst>
+          </p:cNvPr>
+          <p:cNvSpPr txBox="1"/>
+          <p:nvPr/>
+        </p:nvSpPr>
+        <p:spPr>
+          <a:xfrm>
+            <a:off x="7930151" y="3319243"/>
+            <a:ext cx="2387192" cy="307777"/>
+          </a:xfrm>
+          <a:prstGeom prst="rect">
+            <a:avLst/>
+          </a:prstGeom>
+          <a:solidFill>
+            <a:schemeClr val="bg1"/>
+          </a:solidFill>
+        </p:spPr>
+        <p:txBody>
+          <a:bodyPr wrap="none" rtlCol="0">
+            <a:spAutoFit/>
+          </a:bodyPr>
+          <a:lstStyle/>
+          <a:p>
+            <a:r>
+              <a:rPr lang="en-CA" sz="1400" dirty="0"/>
+              <a:t>Western Sandpiper (VI: 0.75)</a:t>
+            </a:r>
+          </a:p>
+        </p:txBody>
+      </p:sp>
+      <p:sp>
+        <p:nvSpPr>
+          <p:cNvPr id="12" name="TextBox 11">
+            <a:extLst>
+              <a:ext uri="{FF2B5EF4-FFF2-40B4-BE49-F238E27FC236}">
+                <a16:creationId xmlns:a16="http://schemas.microsoft.com/office/drawing/2014/main" id="{9446400F-3F10-F8DC-0D64-67470E26D706}"/>
+              </a:ext>
+            </a:extLst>
+          </p:cNvPr>
+          <p:cNvSpPr txBox="1"/>
+          <p:nvPr/>
+        </p:nvSpPr>
+        <p:spPr>
+          <a:xfrm>
+            <a:off x="4500693" y="1584120"/>
+            <a:ext cx="479983" cy="261610"/>
+          </a:xfrm>
+          <a:prstGeom prst="rect">
+            <a:avLst/>
+          </a:prstGeom>
+          <a:solidFill>
+            <a:schemeClr val="bg1"/>
+          </a:solidFill>
+        </p:spPr>
+        <p:txBody>
+          <a:bodyPr wrap="square" rtlCol="0">
+            <a:spAutoFit/>
+          </a:bodyPr>
+          <a:lstStyle/>
+          <a:p>
+            <a:r>
+              <a:rPr lang="en-CA" sz="1100" dirty="0"/>
+              <a:t>CCS</a:t>
+            </a:r>
+          </a:p>
+        </p:txBody>
+      </p:sp>
+      <p:sp>
+        <p:nvSpPr>
+          <p:cNvPr id="13" name="TextBox 12">
+            <a:extLst>
+              <a:ext uri="{FF2B5EF4-FFF2-40B4-BE49-F238E27FC236}">
+                <a16:creationId xmlns:a16="http://schemas.microsoft.com/office/drawing/2014/main" id="{CE06D6CC-0C5F-42C2-B245-4ECC0B0BBD15}"/>
+              </a:ext>
+            </a:extLst>
+          </p:cNvPr>
+          <p:cNvSpPr txBox="1"/>
+          <p:nvPr/>
+        </p:nvSpPr>
+        <p:spPr>
+          <a:xfrm>
+            <a:off x="7542404" y="1584120"/>
+            <a:ext cx="479983" cy="261610"/>
+          </a:xfrm>
+          <a:prstGeom prst="rect">
+            <a:avLst/>
+          </a:prstGeom>
+          <a:solidFill>
+            <a:schemeClr val="bg1"/>
+          </a:solidFill>
+        </p:spPr>
+        <p:txBody>
+          <a:bodyPr wrap="square" rtlCol="0">
+            <a:spAutoFit/>
+          </a:bodyPr>
+          <a:lstStyle/>
+          <a:p>
+            <a:r>
+              <a:rPr lang="en-CA" sz="1100" dirty="0"/>
+              <a:t>CCS</a:t>
+            </a:r>
+          </a:p>
+        </p:txBody>
+      </p:sp>
+      <p:sp>
+        <p:nvSpPr>
+          <p:cNvPr id="14" name="TextBox 13">
+            <a:extLst>
+              <a:ext uri="{FF2B5EF4-FFF2-40B4-BE49-F238E27FC236}">
+                <a16:creationId xmlns:a16="http://schemas.microsoft.com/office/drawing/2014/main" id="{01871A5B-BF99-791A-F760-0C27F5F03312}"/>
+              </a:ext>
+            </a:extLst>
+          </p:cNvPr>
+          <p:cNvSpPr txBox="1"/>
+          <p:nvPr/>
+        </p:nvSpPr>
+        <p:spPr>
+          <a:xfrm>
+            <a:off x="1438010" y="1584120"/>
+            <a:ext cx="479983" cy="261610"/>
+          </a:xfrm>
+          <a:prstGeom prst="rect">
+            <a:avLst/>
+          </a:prstGeom>
+          <a:solidFill>
+            <a:schemeClr val="bg1"/>
+          </a:solidFill>
+        </p:spPr>
+        <p:txBody>
+          <a:bodyPr wrap="square" rtlCol="0">
+            <a:spAutoFit/>
+          </a:bodyPr>
+          <a:lstStyle/>
+          <a:p>
+            <a:r>
+              <a:rPr lang="en-CA" sz="1100" dirty="0"/>
+              <a:t>CCS</a:t>
+            </a:r>
+          </a:p>
+        </p:txBody>
+      </p:sp>
+      <p:sp>
+        <p:nvSpPr>
+          <p:cNvPr id="15" name="TextBox 14">
+            <a:extLst>
+              <a:ext uri="{FF2B5EF4-FFF2-40B4-BE49-F238E27FC236}">
+                <a16:creationId xmlns:a16="http://schemas.microsoft.com/office/drawing/2014/main" id="{34753F5B-F0BB-0135-4A8B-8A18E521B69E}"/>
+              </a:ext>
+            </a:extLst>
+          </p:cNvPr>
+          <p:cNvSpPr txBox="1"/>
+          <p:nvPr/>
+        </p:nvSpPr>
+        <p:spPr>
+          <a:xfrm>
+            <a:off x="1438010" y="5012270"/>
+            <a:ext cx="479983" cy="261610"/>
+          </a:xfrm>
+          <a:prstGeom prst="rect">
+            <a:avLst/>
+          </a:prstGeom>
+          <a:solidFill>
+            <a:schemeClr val="bg1"/>
+          </a:solidFill>
+        </p:spPr>
+        <p:txBody>
+          <a:bodyPr wrap="square" rtlCol="0">
+            <a:spAutoFit/>
+          </a:bodyPr>
+          <a:lstStyle/>
+          <a:p>
+            <a:r>
+              <a:rPr lang="en-CA" sz="1100" dirty="0"/>
+              <a:t>CCS</a:t>
+            </a:r>
+          </a:p>
+        </p:txBody>
+      </p:sp>
+      <p:sp>
+        <p:nvSpPr>
+          <p:cNvPr id="16" name="TextBox 15">
+            <a:extLst>
+              <a:ext uri="{FF2B5EF4-FFF2-40B4-BE49-F238E27FC236}">
+                <a16:creationId xmlns:a16="http://schemas.microsoft.com/office/drawing/2014/main" id="{1C0B66A4-17EC-88DF-6BCC-8588E29D58DF}"/>
+              </a:ext>
+            </a:extLst>
+          </p:cNvPr>
+          <p:cNvSpPr txBox="1"/>
+          <p:nvPr/>
+        </p:nvSpPr>
+        <p:spPr>
+          <a:xfrm>
+            <a:off x="4500693" y="5012270"/>
+            <a:ext cx="479983" cy="261610"/>
+          </a:xfrm>
+          <a:prstGeom prst="rect">
+            <a:avLst/>
+          </a:prstGeom>
+          <a:solidFill>
+            <a:schemeClr val="bg1"/>
+          </a:solidFill>
+        </p:spPr>
+        <p:txBody>
+          <a:bodyPr wrap="square" rtlCol="0">
+            <a:spAutoFit/>
+          </a:bodyPr>
+          <a:lstStyle/>
+          <a:p>
+            <a:r>
+              <a:rPr lang="en-CA" sz="1100" dirty="0"/>
+              <a:t>CCS</a:t>
+            </a:r>
+          </a:p>
+        </p:txBody>
+      </p:sp>
+      <p:sp>
+        <p:nvSpPr>
+          <p:cNvPr id="17" name="TextBox 16">
+            <a:extLst>
+              <a:ext uri="{FF2B5EF4-FFF2-40B4-BE49-F238E27FC236}">
+                <a16:creationId xmlns:a16="http://schemas.microsoft.com/office/drawing/2014/main" id="{CEE9CABF-D475-E4D4-5DE2-FE78B4C86872}"/>
+              </a:ext>
+            </a:extLst>
+          </p:cNvPr>
+          <p:cNvSpPr txBox="1"/>
+          <p:nvPr/>
+        </p:nvSpPr>
+        <p:spPr>
+          <a:xfrm>
+            <a:off x="7542405" y="5012270"/>
+            <a:ext cx="479983" cy="261610"/>
+          </a:xfrm>
+          <a:prstGeom prst="rect">
+            <a:avLst/>
+          </a:prstGeom>
+          <a:solidFill>
+            <a:schemeClr val="bg1"/>
+          </a:solidFill>
+        </p:spPr>
+        <p:txBody>
+          <a:bodyPr wrap="square" rtlCol="0">
+            <a:spAutoFit/>
+          </a:bodyPr>
+          <a:lstStyle/>
+          <a:p>
+            <a:r>
+              <a:rPr lang="en-CA" sz="1100" dirty="0"/>
+              <a:t>CCS</a:t>
+            </a:r>
+          </a:p>
+        </p:txBody>
+      </p:sp>
+      <p:sp>
+        <p:nvSpPr>
+          <p:cNvPr id="18" name="TextBox 17">
+            <a:extLst>
+              <a:ext uri="{FF2B5EF4-FFF2-40B4-BE49-F238E27FC236}">
+                <a16:creationId xmlns:a16="http://schemas.microsoft.com/office/drawing/2014/main" id="{F9212DFE-D9AF-8871-26B5-93EDFF6CEC77}"/>
+              </a:ext>
+            </a:extLst>
+          </p:cNvPr>
+          <p:cNvSpPr txBox="1"/>
+          <p:nvPr/>
+        </p:nvSpPr>
+        <p:spPr>
+          <a:xfrm>
+            <a:off x="2857850" y="2845114"/>
+            <a:ext cx="371912" cy="261610"/>
+          </a:xfrm>
+          <a:prstGeom prst="rect">
+            <a:avLst/>
+          </a:prstGeom>
+          <a:solidFill>
+            <a:schemeClr val="bg1"/>
+          </a:solidFill>
+        </p:spPr>
+        <p:txBody>
+          <a:bodyPr wrap="square" rtlCol="0">
+            <a:spAutoFit/>
+          </a:bodyPr>
+          <a:lstStyle/>
+          <a:p>
+            <a:r>
+              <a:rPr lang="en-CA" sz="1100" dirty="0"/>
+              <a:t>FM</a:t>
+            </a:r>
+          </a:p>
+        </p:txBody>
+      </p:sp>
+      <p:sp>
+        <p:nvSpPr>
+          <p:cNvPr id="19" name="TextBox 18">
+            <a:extLst>
+              <a:ext uri="{FF2B5EF4-FFF2-40B4-BE49-F238E27FC236}">
+                <a16:creationId xmlns:a16="http://schemas.microsoft.com/office/drawing/2014/main" id="{2408F81C-C1B2-FB98-C367-DEFB3C3D06E8}"/>
+              </a:ext>
+            </a:extLst>
+          </p:cNvPr>
+          <p:cNvSpPr txBox="1"/>
+          <p:nvPr/>
+        </p:nvSpPr>
+        <p:spPr>
+          <a:xfrm>
+            <a:off x="5910044" y="2845114"/>
+            <a:ext cx="371912" cy="261610"/>
+          </a:xfrm>
+          <a:prstGeom prst="rect">
+            <a:avLst/>
+          </a:prstGeom>
+          <a:solidFill>
+            <a:schemeClr val="bg1"/>
+          </a:solidFill>
+        </p:spPr>
+        <p:txBody>
+          <a:bodyPr wrap="square" rtlCol="0">
+            <a:spAutoFit/>
+          </a:bodyPr>
+          <a:lstStyle/>
+          <a:p>
+            <a:r>
+              <a:rPr lang="en-CA" sz="1100" dirty="0"/>
+              <a:t>FM</a:t>
+            </a:r>
+          </a:p>
+        </p:txBody>
+      </p:sp>
+      <p:sp>
+        <p:nvSpPr>
+          <p:cNvPr id="20" name="TextBox 19">
+            <a:extLst>
+              <a:ext uri="{FF2B5EF4-FFF2-40B4-BE49-F238E27FC236}">
+                <a16:creationId xmlns:a16="http://schemas.microsoft.com/office/drawing/2014/main" id="{9E54BF6D-A4B0-031C-C0E4-D9C84AB30180}"/>
+              </a:ext>
+            </a:extLst>
+          </p:cNvPr>
+          <p:cNvSpPr txBox="1"/>
+          <p:nvPr/>
+        </p:nvSpPr>
+        <p:spPr>
+          <a:xfrm>
+            <a:off x="8962238" y="2845114"/>
+            <a:ext cx="371912" cy="261610"/>
+          </a:xfrm>
+          <a:prstGeom prst="rect">
+            <a:avLst/>
+          </a:prstGeom>
+          <a:solidFill>
+            <a:schemeClr val="bg1"/>
+          </a:solidFill>
+        </p:spPr>
+        <p:txBody>
+          <a:bodyPr wrap="square" rtlCol="0">
+            <a:spAutoFit/>
+          </a:bodyPr>
+          <a:lstStyle/>
+          <a:p>
+            <a:r>
+              <a:rPr lang="en-CA" sz="1100" dirty="0"/>
+              <a:t>FM</a:t>
+            </a:r>
+          </a:p>
+        </p:txBody>
+      </p:sp>
+      <p:sp>
+        <p:nvSpPr>
+          <p:cNvPr id="21" name="TextBox 20">
+            <a:extLst>
+              <a:ext uri="{FF2B5EF4-FFF2-40B4-BE49-F238E27FC236}">
+                <a16:creationId xmlns:a16="http://schemas.microsoft.com/office/drawing/2014/main" id="{50F41937-BAE7-EB1C-1E38-2CA726F0E953}"/>
+              </a:ext>
+            </a:extLst>
+          </p:cNvPr>
+          <p:cNvSpPr txBox="1"/>
+          <p:nvPr/>
+        </p:nvSpPr>
+        <p:spPr>
+          <a:xfrm>
+            <a:off x="2868563" y="6260832"/>
+            <a:ext cx="371912" cy="261610"/>
+          </a:xfrm>
+          <a:prstGeom prst="rect">
+            <a:avLst/>
+          </a:prstGeom>
+          <a:solidFill>
+            <a:schemeClr val="bg1"/>
+          </a:solidFill>
+        </p:spPr>
+        <p:txBody>
+          <a:bodyPr wrap="square" rtlCol="0">
+            <a:spAutoFit/>
+          </a:bodyPr>
+          <a:lstStyle/>
+          <a:p>
+            <a:r>
+              <a:rPr lang="en-CA" sz="1100" dirty="0"/>
+              <a:t>FM</a:t>
+            </a:r>
+          </a:p>
+        </p:txBody>
+      </p:sp>
+      <p:sp>
+        <p:nvSpPr>
+          <p:cNvPr id="22" name="TextBox 21">
+            <a:extLst>
+              <a:ext uri="{FF2B5EF4-FFF2-40B4-BE49-F238E27FC236}">
+                <a16:creationId xmlns:a16="http://schemas.microsoft.com/office/drawing/2014/main" id="{E38A7526-6977-EF23-D65A-AE244CB9BD34}"/>
+              </a:ext>
+            </a:extLst>
+          </p:cNvPr>
+          <p:cNvSpPr txBox="1"/>
+          <p:nvPr/>
+        </p:nvSpPr>
+        <p:spPr>
+          <a:xfrm>
+            <a:off x="5910044" y="6260832"/>
+            <a:ext cx="371912" cy="261610"/>
+          </a:xfrm>
+          <a:prstGeom prst="rect">
+            <a:avLst/>
+          </a:prstGeom>
+          <a:solidFill>
+            <a:schemeClr val="bg1"/>
+          </a:solidFill>
+        </p:spPr>
+        <p:txBody>
+          <a:bodyPr wrap="square" rtlCol="0">
+            <a:spAutoFit/>
+          </a:bodyPr>
+          <a:lstStyle/>
+          <a:p>
+            <a:r>
+              <a:rPr lang="en-CA" sz="1100" dirty="0"/>
+              <a:t>FM</a:t>
+            </a:r>
+          </a:p>
+        </p:txBody>
+      </p:sp>
+      <p:sp>
+        <p:nvSpPr>
+          <p:cNvPr id="23" name="TextBox 22">
+            <a:extLst>
+              <a:ext uri="{FF2B5EF4-FFF2-40B4-BE49-F238E27FC236}">
+                <a16:creationId xmlns:a16="http://schemas.microsoft.com/office/drawing/2014/main" id="{2B8A2605-6435-252A-1D76-030E48A07C00}"/>
+              </a:ext>
+            </a:extLst>
+          </p:cNvPr>
+          <p:cNvSpPr txBox="1"/>
+          <p:nvPr/>
+        </p:nvSpPr>
+        <p:spPr>
+          <a:xfrm>
+            <a:off x="8962238" y="6260832"/>
+            <a:ext cx="371912" cy="261610"/>
+          </a:xfrm>
+          <a:prstGeom prst="rect">
+            <a:avLst/>
+          </a:prstGeom>
+          <a:solidFill>
+            <a:schemeClr val="bg1"/>
+          </a:solidFill>
+        </p:spPr>
+        <p:txBody>
+          <a:bodyPr wrap="square" rtlCol="0">
+            <a:spAutoFit/>
+          </a:bodyPr>
+          <a:lstStyle/>
+          <a:p>
+            <a:r>
+              <a:rPr lang="en-CA" sz="1100" dirty="0"/>
+              <a:t>FM</a:t>
+            </a:r>
+          </a:p>
+        </p:txBody>
+      </p:sp>
+    </p:spTree>
+    <p:extLst>
+      <p:ext uri="{BB962C8B-B14F-4D97-AF65-F5344CB8AC3E}">
+        <p14:creationId xmlns:p14="http://schemas.microsoft.com/office/powerpoint/2010/main" val="357296800"/>
+      </p:ext>
+    </p:extLst>
+  </p:cSld>
+  <p:clrMapOvr>
+    <a:masterClrMapping/>
+  </p:clrMapOvr>
+</p:sld>
+</file>
+
+<file path=ppt/slides/slide3.xml><?xml version="1.0" encoding="utf-8"?>
 <p:sld xmlns:a="http://schemas.openxmlformats.org/drawingml/2006/main" xmlns:r="http://schemas.openxmlformats.org/officeDocument/2006/relationships" xmlns:p="http://schemas.openxmlformats.org/presentationml/2006/main">
   <p:cSld>
     <p:spTree>
